--- a/UC2026_template.pptx
+++ b/UC2026_template.pptx
@@ -5,15 +5,13 @@
     <p:sldMasterId id="2147493455" r:id="rId5"/>
   </p:sldMasterIdLst>
   <p:notesMasterIdLst>
-    <p:notesMasterId r:id="rId9"/>
+    <p:notesMasterId r:id="rId7"/>
   </p:notesMasterIdLst>
   <p:handoutMasterIdLst>
-    <p:handoutMasterId r:id="rId10"/>
+    <p:handoutMasterId r:id="rId8"/>
   </p:handoutMasterIdLst>
   <p:sldIdLst>
     <p:sldId id="256" r:id="rId6"/>
-    <p:sldId id="257" r:id="rId7"/>
-    <p:sldId id="258" r:id="rId8"/>
   </p:sldIdLst>
   <p:sldSz cx="10160000" cy="5715000"/>
   <p:notesSz cx="9144000" cy="6858000"/>
@@ -3874,429 +3872,6 @@
     <p:extLst>
       <p:ext uri="{BB962C8B-B14F-4D97-AF65-F5344CB8AC3E}">
         <p14:creationId xmlns:p14="http://schemas.microsoft.com/office/powerpoint/2010/main" val="1533518440"/>
-      </p:ext>
-    </p:extLst>
-  </p:cSld>
-  <p:clrMapOvr>
-    <a:masterClrMapping/>
-  </p:clrMapOvr>
-</p:sld>
-</file>
-
-<file path=ppt/slides/slide2.xml><?xml version="1.0" encoding="utf-8"?>
-<p:sld xmlns:a="http://schemas.openxmlformats.org/drawingml/2006/main" xmlns:r="http://schemas.openxmlformats.org/officeDocument/2006/relationships" xmlns:p="http://schemas.openxmlformats.org/presentationml/2006/main">
-  <p:cSld>
-    <p:spTree>
-      <p:nvGrpSpPr>
-        <p:cNvPr id="1" name=""/>
-        <p:cNvGrpSpPr/>
-        <p:nvPr/>
-      </p:nvGrpSpPr>
-      <p:grpSpPr>
-        <a:xfrm>
-          <a:off x="0" y="0"/>
-          <a:ext cx="0" cy="0"/>
-          <a:chOff x="0" y="0"/>
-          <a:chExt cx="0" cy="0"/>
-        </a:xfrm>
-      </p:grpSpPr>
-      <p:sp>
-        <p:nvSpPr>
-          <p:cNvPr id="2" name="Content Placeholder 1"/>
-          <p:cNvSpPr>
-            <a:spLocks noGrp="1"/>
-          </p:cNvSpPr>
-          <p:nvPr>
-            <p:ph idx="1"/>
-          </p:nvPr>
-        </p:nvSpPr>
-        <p:spPr>
-          <a:xfrm>
-            <a:off x="390889" y="1476117"/>
-            <a:ext cx="3740240" cy="3686773"/>
-          </a:xfrm>
-        </p:spPr>
-        <p:txBody>
-          <a:bodyPr/>
-          <a:lstStyle/>
-          <a:p>
-            <a:pPr marL="0" indent="0">
-              <a:buNone/>
-            </a:pPr>
-            <a:r>
-              <a:rPr lang="en-US" sz="1800" b="1" dirty="0"/>
-              <a:t>Keep it Simple</a:t>
-            </a:r>
-            <a:endParaRPr lang="en-US" sz="1800" dirty="0"/>
-          </a:p>
-          <a:p>
-            <a:pPr marL="0" indent="0">
-              <a:buNone/>
-            </a:pPr>
-            <a:r>
-              <a:rPr lang="en-US" sz="1800" dirty="0"/>
-              <a:t>You want people to be listening to you and your message. Don’t distract the audience with slides that are complicated, hard to read or loaded with details.</a:t>
-            </a:r>
-          </a:p>
-          <a:p>
-            <a:pPr marL="0" indent="0">
-              <a:buNone/>
-            </a:pPr>
-            <a:endParaRPr lang="en-US" sz="1050" dirty="0"/>
-          </a:p>
-          <a:p>
-            <a:pPr marL="0" indent="0">
-              <a:buNone/>
-            </a:pPr>
-            <a:r>
-              <a:rPr lang="en-US" sz="1800" b="1" dirty="0"/>
-              <a:t>Limit text and bullet points</a:t>
-            </a:r>
-            <a:endParaRPr lang="en-US" sz="1800" dirty="0"/>
-          </a:p>
-          <a:p>
-            <a:pPr marL="0" indent="0">
-              <a:buNone/>
-            </a:pPr>
-            <a:r>
-              <a:rPr lang="en-US" sz="1800" dirty="0"/>
-              <a:t>Slides should be visual aids for your narration; not an echo of what you’re saying. Text is best set to 30 points or larger.</a:t>
-            </a:r>
-          </a:p>
-          <a:p>
-            <a:pPr marL="0" indent="0">
-              <a:buNone/>
-            </a:pPr>
-            <a:r>
-              <a:rPr lang="en-US" sz="1800" dirty="0"/>
-              <a:t> </a:t>
-            </a:r>
-          </a:p>
-        </p:txBody>
-      </p:sp>
-      <p:sp>
-        <p:nvSpPr>
-          <p:cNvPr id="3" name="Title 2"/>
-          <p:cNvSpPr>
-            <a:spLocks noGrp="1"/>
-          </p:cNvSpPr>
-          <p:nvPr>
-            <p:ph type="title"/>
-          </p:nvPr>
-        </p:nvSpPr>
-        <p:spPr/>
-        <p:txBody>
-          <a:bodyPr/>
-          <a:lstStyle/>
-          <a:p>
-            <a:r>
-              <a:rPr lang="en-US" dirty="0"/>
-              <a:t>PowerPoint Best Practices</a:t>
-            </a:r>
-          </a:p>
-        </p:txBody>
-      </p:sp>
-      <p:sp>
-        <p:nvSpPr>
-          <p:cNvPr id="4" name="TextBox 3"/>
-          <p:cNvSpPr txBox="1"/>
-          <p:nvPr/>
-        </p:nvSpPr>
-        <p:spPr>
-          <a:xfrm>
-            <a:off x="4841421" y="1469571"/>
-            <a:ext cx="3812721" cy="3416320"/>
-          </a:xfrm>
-          <a:prstGeom prst="rect">
-            <a:avLst/>
-          </a:prstGeom>
-          <a:noFill/>
-        </p:spPr>
-        <p:txBody>
-          <a:bodyPr wrap="square" rtlCol="0">
-            <a:spAutoFit/>
-          </a:bodyPr>
-          <a:lstStyle/>
-          <a:p>
-            <a:r>
-              <a:rPr lang="en-US" b="1" dirty="0">
-                <a:latin typeface="Arial" charset="0"/>
-                <a:ea typeface="Arial" charset="0"/>
-                <a:cs typeface="Arial" charset="0"/>
-              </a:rPr>
-              <a:t>Use high quality graphics</a:t>
-            </a:r>
-            <a:endParaRPr lang="en-US" dirty="0">
-              <a:latin typeface="Arial" charset="0"/>
-              <a:ea typeface="Arial" charset="0"/>
-              <a:cs typeface="Arial" charset="0"/>
-            </a:endParaRPr>
-          </a:p>
-          <a:p>
-            <a:r>
-              <a:rPr lang="en-US" dirty="0">
-                <a:latin typeface="Arial" charset="0"/>
-                <a:ea typeface="Arial" charset="0"/>
-                <a:cs typeface="Arial" charset="0"/>
-              </a:rPr>
-              <a:t>An effective way of reducing text content is to use high quality images to illustrate your main points. Impactful full-screen photos, and clean and concise charts can be very engaging. Check these sites for possible imagery: </a:t>
-            </a:r>
-          </a:p>
-          <a:p>
-            <a:r>
-              <a:rPr lang="en-US" u="sng" dirty="0">
-                <a:latin typeface="Arial" charset="0"/>
-                <a:ea typeface="Arial" charset="0"/>
-                <a:cs typeface="Arial" charset="0"/>
-                <a:hlinkClick r:id="rId2"/>
-              </a:rPr>
-              <a:t>burst.shopify.com</a:t>
-            </a:r>
-            <a:r>
-              <a:rPr lang="en-US" dirty="0">
-                <a:latin typeface="Arial" charset="0"/>
-                <a:ea typeface="Arial" charset="0"/>
-                <a:cs typeface="Arial" charset="0"/>
-              </a:rPr>
-              <a:t>  </a:t>
-            </a:r>
-          </a:p>
-          <a:p>
-            <a:r>
-              <a:rPr lang="en-US" u="sng" dirty="0">
-                <a:latin typeface="Arial" charset="0"/>
-                <a:ea typeface="Arial" charset="0"/>
-                <a:cs typeface="Arial" charset="0"/>
-                <a:hlinkClick r:id="rId3"/>
-              </a:rPr>
-              <a:t>freestocks.org</a:t>
-            </a:r>
-            <a:endParaRPr lang="en-US" dirty="0">
-              <a:latin typeface="Arial" charset="0"/>
-              <a:ea typeface="Arial" charset="0"/>
-              <a:cs typeface="Arial" charset="0"/>
-            </a:endParaRPr>
-          </a:p>
-          <a:p>
-            <a:r>
-              <a:rPr lang="en-US" u="sng" dirty="0">
-                <a:latin typeface="Arial" charset="0"/>
-                <a:ea typeface="Arial" charset="0"/>
-                <a:cs typeface="Arial" charset="0"/>
-                <a:hlinkClick r:id="rId4"/>
-              </a:rPr>
-              <a:t>istock.com</a:t>
-            </a:r>
-            <a:endParaRPr lang="en-US" dirty="0">
-              <a:latin typeface="Arial" charset="0"/>
-              <a:ea typeface="Arial" charset="0"/>
-              <a:cs typeface="Arial" charset="0"/>
-            </a:endParaRPr>
-          </a:p>
-          <a:p>
-            <a:r>
-              <a:rPr lang="en-US" u="sng" dirty="0">
-                <a:latin typeface="Arial" charset="0"/>
-                <a:ea typeface="Arial" charset="0"/>
-                <a:cs typeface="Arial" charset="0"/>
-                <a:hlinkClick r:id="rId5"/>
-              </a:rPr>
-              <a:t>shutterstock.com</a:t>
-            </a:r>
-            <a:endParaRPr lang="en-US" dirty="0">
-              <a:latin typeface="Arial" charset="0"/>
-              <a:ea typeface="Arial" charset="0"/>
-              <a:cs typeface="Arial" charset="0"/>
-            </a:endParaRPr>
-          </a:p>
-        </p:txBody>
-      </p:sp>
-    </p:spTree>
-    <p:extLst>
-      <p:ext uri="{BB962C8B-B14F-4D97-AF65-F5344CB8AC3E}">
-        <p14:creationId xmlns:p14="http://schemas.microsoft.com/office/powerpoint/2010/main" val="187798503"/>
-      </p:ext>
-    </p:extLst>
-  </p:cSld>
-  <p:clrMapOvr>
-    <a:masterClrMapping/>
-  </p:clrMapOvr>
-</p:sld>
-</file>
-
-<file path=ppt/slides/slide3.xml><?xml version="1.0" encoding="utf-8"?>
-<p:sld xmlns:a="http://schemas.openxmlformats.org/drawingml/2006/main" xmlns:r="http://schemas.openxmlformats.org/officeDocument/2006/relationships" xmlns:p="http://schemas.openxmlformats.org/presentationml/2006/main">
-  <p:cSld>
-    <p:spTree>
-      <p:nvGrpSpPr>
-        <p:cNvPr id="1" name=""/>
-        <p:cNvGrpSpPr/>
-        <p:nvPr/>
-      </p:nvGrpSpPr>
-      <p:grpSpPr>
-        <a:xfrm>
-          <a:off x="0" y="0"/>
-          <a:ext cx="0" cy="0"/>
-          <a:chOff x="0" y="0"/>
-          <a:chExt cx="0" cy="0"/>
-        </a:xfrm>
-      </p:grpSpPr>
-      <p:sp>
-        <p:nvSpPr>
-          <p:cNvPr id="2" name="Content Placeholder 1"/>
-          <p:cNvSpPr>
-            <a:spLocks noGrp="1"/>
-          </p:cNvSpPr>
-          <p:nvPr>
-            <p:ph idx="1"/>
-          </p:nvPr>
-        </p:nvSpPr>
-        <p:spPr>
-          <a:xfrm>
-            <a:off x="390889" y="1476118"/>
-            <a:ext cx="3740240" cy="2548876"/>
-          </a:xfrm>
-        </p:spPr>
-        <p:txBody>
-          <a:bodyPr/>
-          <a:lstStyle/>
-          <a:p>
-            <a:pPr marL="0" indent="0">
-              <a:buNone/>
-            </a:pPr>
-            <a:r>
-              <a:rPr lang="en-US" sz="1800" b="1" dirty="0"/>
-              <a:t>Keep it short</a:t>
-            </a:r>
-            <a:endParaRPr lang="en-US" sz="1800" dirty="0"/>
-          </a:p>
-          <a:p>
-            <a:pPr marL="0" indent="0">
-              <a:buNone/>
-            </a:pPr>
-            <a:r>
-              <a:rPr lang="en-US" sz="1800" dirty="0"/>
-              <a:t>While a 10-slide limit may not work for all presentations it’s a PowerPoint Best that is good to strive for </a:t>
-            </a:r>
-            <a:r>
-              <a:rPr lang="en-US" sz="1800" dirty="0" err="1"/>
-              <a:t>andPractice</a:t>
-            </a:r>
-            <a:r>
-              <a:rPr lang="en-US" sz="1800" dirty="0"/>
-              <a:t>  a way to remind yourself that the presentation is your narrative not verbatim slides.</a:t>
-            </a:r>
-          </a:p>
-        </p:txBody>
-      </p:sp>
-      <p:sp>
-        <p:nvSpPr>
-          <p:cNvPr id="3" name="Title 2"/>
-          <p:cNvSpPr>
-            <a:spLocks noGrp="1"/>
-          </p:cNvSpPr>
-          <p:nvPr>
-            <p:ph type="title"/>
-          </p:nvPr>
-        </p:nvSpPr>
-        <p:spPr/>
-        <p:txBody>
-          <a:bodyPr/>
-          <a:lstStyle/>
-          <a:p>
-            <a:r>
-              <a:rPr lang="en-US" dirty="0"/>
-              <a:t>PowerPoint Best Practices</a:t>
-            </a:r>
-          </a:p>
-        </p:txBody>
-      </p:sp>
-      <p:sp>
-        <p:nvSpPr>
-          <p:cNvPr id="4" name="TextBox 3"/>
-          <p:cNvSpPr txBox="1"/>
-          <p:nvPr/>
-        </p:nvSpPr>
-        <p:spPr>
-          <a:xfrm>
-            <a:off x="4841421" y="1469571"/>
-            <a:ext cx="3771899" cy="2031325"/>
-          </a:xfrm>
-          <a:prstGeom prst="rect">
-            <a:avLst/>
-          </a:prstGeom>
-          <a:noFill/>
-        </p:spPr>
-        <p:txBody>
-          <a:bodyPr wrap="square" rtlCol="0">
-            <a:spAutoFit/>
-          </a:bodyPr>
-          <a:lstStyle/>
-          <a:p>
-            <a:r>
-              <a:rPr lang="en-US" b="1" dirty="0">
-                <a:latin typeface="Arial" charset="0"/>
-                <a:ea typeface="Arial" charset="0"/>
-                <a:cs typeface="Arial" charset="0"/>
-              </a:rPr>
-              <a:t>Customize!</a:t>
-            </a:r>
-            <a:endParaRPr lang="en-US" dirty="0">
-              <a:latin typeface="Arial" charset="0"/>
-              <a:ea typeface="Arial" charset="0"/>
-              <a:cs typeface="Arial" charset="0"/>
-            </a:endParaRPr>
-          </a:p>
-          <a:p>
-            <a:r>
-              <a:rPr lang="en-US" dirty="0">
-                <a:latin typeface="Arial" charset="0"/>
-                <a:ea typeface="Arial" charset="0"/>
-                <a:cs typeface="Arial" charset="0"/>
-              </a:rPr>
-              <a:t>This template provides a foundation from which to build your presentation. Select the slides that will best house your content and order them in a sequence that will establish the best narrative. </a:t>
-            </a:r>
-          </a:p>
-        </p:txBody>
-      </p:sp>
-      <p:sp>
-        <p:nvSpPr>
-          <p:cNvPr id="6" name="TextBox 5"/>
-          <p:cNvSpPr txBox="1"/>
-          <p:nvPr/>
-        </p:nvSpPr>
-        <p:spPr>
-          <a:xfrm>
-            <a:off x="369952" y="4359870"/>
-            <a:ext cx="8891904" cy="338554"/>
-          </a:xfrm>
-          <a:prstGeom prst="rect">
-            <a:avLst/>
-          </a:prstGeom>
-          <a:noFill/>
-        </p:spPr>
-        <p:txBody>
-          <a:bodyPr wrap="square" rtlCol="0">
-            <a:spAutoFit/>
-          </a:bodyPr>
-          <a:lstStyle/>
-          <a:p>
-            <a:r>
-              <a:rPr lang="en-US" sz="1600" b="1" dirty="0"/>
-              <a:t>NOTE: </a:t>
-            </a:r>
-            <a:r>
-              <a:rPr lang="en-US" sz="1600" dirty="0"/>
-              <a:t>Edits to the core elements of the slides may be done by accessing Master Slide View</a:t>
-            </a:r>
-            <a:endParaRPr lang="en-US" dirty="0"/>
-          </a:p>
-        </p:txBody>
-      </p:sp>
-    </p:spTree>
-    <p:extLst>
-      <p:ext uri="{BB962C8B-B14F-4D97-AF65-F5344CB8AC3E}">
-        <p14:creationId xmlns:p14="http://schemas.microsoft.com/office/powerpoint/2010/main" val="1360325607"/>
       </p:ext>
     </p:extLst>
   </p:cSld>
@@ -5281,53 +4856,25 @@
 </file>
 
 <file path=customXml/item2.xml><?xml version="1.0" encoding="utf-8"?>
-<?mso-contentType ?>
-<spe:Receivers xmlns:spe="http://schemas.microsoft.com/sharepoint/events">
-  <Receiver>
-    <Name>Document ID Generator</Name>
-    <Synchronization>Synchronous</Synchronization>
-    <Type>10001</Type>
-    <SequenceNumber>1000</SequenceNumber>
-    <Url/>
-    <Assembly>Microsoft.Office.DocumentManagement, Version=16.0.0.0, Culture=neutral, PublicKeyToken=71e9bce111e9429c</Assembly>
-    <Class>Microsoft.Office.DocumentManagement.Internal.DocIdHandler</Class>
-    <Data/>
-    <Filter/>
-  </Receiver>
-  <Receiver>
-    <Name>Document ID Generator</Name>
-    <Synchronization>Synchronous</Synchronization>
-    <Type>10002</Type>
-    <SequenceNumber>1001</SequenceNumber>
-    <Url/>
-    <Assembly>Microsoft.Office.DocumentManagement, Version=16.0.0.0, Culture=neutral, PublicKeyToken=71e9bce111e9429c</Assembly>
-    <Class>Microsoft.Office.DocumentManagement.Internal.DocIdHandler</Class>
-    <Data/>
-    <Filter/>
-  </Receiver>
-  <Receiver>
-    <Name>Document ID Generator</Name>
-    <Synchronization>Synchronous</Synchronization>
-    <Type>10004</Type>
-    <SequenceNumber>1002</SequenceNumber>
-    <Url/>
-    <Assembly>Microsoft.Office.DocumentManagement, Version=16.0.0.0, Culture=neutral, PublicKeyToken=71e9bce111e9429c</Assembly>
-    <Class>Microsoft.Office.DocumentManagement.Internal.DocIdHandler</Class>
-    <Data/>
-    <Filter/>
-  </Receiver>
-  <Receiver>
-    <Name>Document ID Generator</Name>
-    <Synchronization>Synchronous</Synchronization>
-    <Type>10006</Type>
-    <SequenceNumber>1003</SequenceNumber>
-    <Url/>
-    <Assembly>Microsoft.Office.DocumentManagement, Version=16.0.0.0, Culture=neutral, PublicKeyToken=71e9bce111e9429c</Assembly>
-    <Class>Microsoft.Office.DocumentManagement.Internal.DocIdHandler</Class>
-    <Data/>
-    <Filter/>
-  </Receiver>
-</spe:Receivers>
+<p:properties xmlns:p="http://schemas.microsoft.com/office/2006/metadata/properties" xmlns:xsi="http://www.w3.org/2001/XMLSchema-instance" xmlns:pc="http://schemas.microsoft.com/office/infopath/2007/PartnerControls">
+  <documentManagement>
+    <TaxCatchAll xmlns="92b78b11-5582-4f0d-9ede-26dc097105ae" xsi:nil="true"/>
+    <_dlc_DocId xmlns="92b78b11-5582-4f0d-9ede-26dc097105ae">EJAN5VX4DXHY-1980639817-436</_dlc_DocId>
+    <_dlc_DocIdUrl xmlns="92b78b11-5582-4f0d-9ede-26dc097105ae">
+      <Url>https://bcit365.sharepoint.com/sites/bcit-marcomm/_layouts/15/DocIdRedir.aspx?ID=EJAN5VX4DXHY-1980639817-436</Url>
+      <Description>EJAN5VX4DXHY-1980639817-436</Description>
+    </_dlc_DocIdUrl>
+    <lcf76f155ced4ddcb4097134ff3c332f xmlns="4b8b16d9-d63f-485d-9d73-fc963e0128fa">
+      <Terms xmlns="http://schemas.microsoft.com/office/infopath/2007/PartnerControls"/>
+    </lcf76f155ced4ddcb4097134ff3c332f>
+    <TaxKeywordTaxHTField xmlns="92b78b11-5582-4f0d-9ede-26dc097105ae">
+      <Terms xmlns="http://schemas.microsoft.com/office/infopath/2007/PartnerControls"/>
+    </TaxKeywordTaxHTField>
+    <b6c4508d405f4c0799f512db8db5e023 xmlns="92b78b11-5582-4f0d-9ede-26dc097105ae">
+      <Terms xmlns="http://schemas.microsoft.com/office/infopath/2007/PartnerControls"/>
+    </b6c4508d405f4c0799f512db8db5e023>
+  </documentManagement>
+</p:properties>
 </file>
 
 <file path=customXml/item3.xml><?xml version="1.0" encoding="utf-8"?>
@@ -5573,25 +5120,53 @@
 </file>
 
 <file path=customXml/item4.xml><?xml version="1.0" encoding="utf-8"?>
-<p:properties xmlns:p="http://schemas.microsoft.com/office/2006/metadata/properties" xmlns:xsi="http://www.w3.org/2001/XMLSchema-instance" xmlns:pc="http://schemas.microsoft.com/office/infopath/2007/PartnerControls">
-  <documentManagement>
-    <TaxCatchAll xmlns="92b78b11-5582-4f0d-9ede-26dc097105ae" xsi:nil="true"/>
-    <_dlc_DocId xmlns="92b78b11-5582-4f0d-9ede-26dc097105ae">EJAN5VX4DXHY-1980639817-436</_dlc_DocId>
-    <_dlc_DocIdUrl xmlns="92b78b11-5582-4f0d-9ede-26dc097105ae">
-      <Url>https://bcit365.sharepoint.com/sites/bcit-marcomm/_layouts/15/DocIdRedir.aspx?ID=EJAN5VX4DXHY-1980639817-436</Url>
-      <Description>EJAN5VX4DXHY-1980639817-436</Description>
-    </_dlc_DocIdUrl>
-    <lcf76f155ced4ddcb4097134ff3c332f xmlns="4b8b16d9-d63f-485d-9d73-fc963e0128fa">
-      <Terms xmlns="http://schemas.microsoft.com/office/infopath/2007/PartnerControls"/>
-    </lcf76f155ced4ddcb4097134ff3c332f>
-    <TaxKeywordTaxHTField xmlns="92b78b11-5582-4f0d-9ede-26dc097105ae">
-      <Terms xmlns="http://schemas.microsoft.com/office/infopath/2007/PartnerControls"/>
-    </TaxKeywordTaxHTField>
-    <b6c4508d405f4c0799f512db8db5e023 xmlns="92b78b11-5582-4f0d-9ede-26dc097105ae">
-      <Terms xmlns="http://schemas.microsoft.com/office/infopath/2007/PartnerControls"/>
-    </b6c4508d405f4c0799f512db8db5e023>
-  </documentManagement>
-</p:properties>
+<?mso-contentType ?>
+<spe:Receivers xmlns:spe="http://schemas.microsoft.com/sharepoint/events">
+  <Receiver>
+    <Name>Document ID Generator</Name>
+    <Synchronization>Synchronous</Synchronization>
+    <Type>10001</Type>
+    <SequenceNumber>1000</SequenceNumber>
+    <Url/>
+    <Assembly>Microsoft.Office.DocumentManagement, Version=16.0.0.0, Culture=neutral, PublicKeyToken=71e9bce111e9429c</Assembly>
+    <Class>Microsoft.Office.DocumentManagement.Internal.DocIdHandler</Class>
+    <Data/>
+    <Filter/>
+  </Receiver>
+  <Receiver>
+    <Name>Document ID Generator</Name>
+    <Synchronization>Synchronous</Synchronization>
+    <Type>10002</Type>
+    <SequenceNumber>1001</SequenceNumber>
+    <Url/>
+    <Assembly>Microsoft.Office.DocumentManagement, Version=16.0.0.0, Culture=neutral, PublicKeyToken=71e9bce111e9429c</Assembly>
+    <Class>Microsoft.Office.DocumentManagement.Internal.DocIdHandler</Class>
+    <Data/>
+    <Filter/>
+  </Receiver>
+  <Receiver>
+    <Name>Document ID Generator</Name>
+    <Synchronization>Synchronous</Synchronization>
+    <Type>10004</Type>
+    <SequenceNumber>1002</SequenceNumber>
+    <Url/>
+    <Assembly>Microsoft.Office.DocumentManagement, Version=16.0.0.0, Culture=neutral, PublicKeyToken=71e9bce111e9429c</Assembly>
+    <Class>Microsoft.Office.DocumentManagement.Internal.DocIdHandler</Class>
+    <Data/>
+    <Filter/>
+  </Receiver>
+  <Receiver>
+    <Name>Document ID Generator</Name>
+    <Synchronization>Synchronous</Synchronization>
+    <Type>10006</Type>
+    <SequenceNumber>1003</SequenceNumber>
+    <Url/>
+    <Assembly>Microsoft.Office.DocumentManagement, Version=16.0.0.0, Culture=neutral, PublicKeyToken=71e9bce111e9429c</Assembly>
+    <Class>Microsoft.Office.DocumentManagement.Internal.DocIdHandler</Class>
+    <Data/>
+    <Filter/>
+  </Receiver>
+</spe:Receivers>
 </file>
 
 <file path=customXml/itemProps1.xml><?xml version="1.0" encoding="utf-8"?>
@@ -5603,9 +5178,13 @@
 </file>
 
 <file path=customXml/itemProps2.xml><?xml version="1.0" encoding="utf-8"?>
-<ds:datastoreItem xmlns:ds="http://schemas.openxmlformats.org/officeDocument/2006/customXml" ds:itemID="{D9D00DFC-C4A3-43B8-9212-E8846D8E3A33}">
+<ds:datastoreItem xmlns:ds="http://schemas.openxmlformats.org/officeDocument/2006/customXml" ds:itemID="{7B6F2769-7194-4217-93D3-3AF3A4742282}">
   <ds:schemaRefs>
-    <ds:schemaRef ds:uri="http://schemas.microsoft.com/sharepoint/events"/>
+    <ds:schemaRef ds:uri="http://schemas.microsoft.com/office/2006/metadata/properties"/>
+    <ds:schemaRef ds:uri="http://schemas.microsoft.com/office/infopath/2007/PartnerControls"/>
+    <ds:schemaRef ds:uri="http://schemas.microsoft.com/sharepoint/v3/fields"/>
+    <ds:schemaRef ds:uri="92b78b11-5582-4f0d-9ede-26dc097105ae"/>
+    <ds:schemaRef ds:uri="4b8b16d9-d63f-485d-9d73-fc963e0128fa"/>
   </ds:schemaRefs>
 </ds:datastoreItem>
 </file>
@@ -5630,13 +5209,9 @@
 </file>
 
 <file path=customXml/itemProps4.xml><?xml version="1.0" encoding="utf-8"?>
-<ds:datastoreItem xmlns:ds="http://schemas.openxmlformats.org/officeDocument/2006/customXml" ds:itemID="{7B6F2769-7194-4217-93D3-3AF3A4742282}">
+<ds:datastoreItem xmlns:ds="http://schemas.openxmlformats.org/officeDocument/2006/customXml" ds:itemID="{D9D00DFC-C4A3-43B8-9212-E8846D8E3A33}">
   <ds:schemaRefs>
-    <ds:schemaRef ds:uri="http://schemas.microsoft.com/office/2006/metadata/properties"/>
-    <ds:schemaRef ds:uri="http://schemas.microsoft.com/office/infopath/2007/PartnerControls"/>
-    <ds:schemaRef ds:uri="http://schemas.microsoft.com/sharepoint/v3/fields"/>
-    <ds:schemaRef ds:uri="92b78b11-5582-4f0d-9ede-26dc097105ae"/>
-    <ds:schemaRef ds:uri="4b8b16d9-d63f-485d-9d73-fc963e0128fa"/>
+    <ds:schemaRef ds:uri="http://schemas.microsoft.com/sharepoint/events"/>
   </ds:schemaRefs>
 </ds:datastoreItem>
 </file>